--- a/classes/parte-8-blue-team-deteccion-y-soc/194-deception-honeypots-y-honeytokens/clase-194-presentacion.pptx
+++ b/classes/parte-8-blue-team-deteccion-y-soc/194-deception-honeypots-y-honeytokens/clase-194-presentacion.pptx
@@ -17,6 +17,11 @@
     <p:sldId id="265" r:id="rId16"/>
     <p:sldId id="266" r:id="rId17"/>
     <p:sldId id="267" r:id="rId18"/>
+    <p:sldId id="268" r:id="rId19"/>
+    <p:sldId id="269" r:id="rId20"/>
+    <p:sldId id="270" r:id="rId21"/>
+    <p:sldId id="271" r:id="rId22"/>
+    <p:sldId id="272" r:id="rId23"/>
   </p:sldIdLst>
   <p:sldSz cx="9144000" cy="6858000" type="screen4x3"/>
   <p:notesSz cx="6858000" cy="9144000"/>
@@ -3198,7 +3203,7 @@
                   <a:srgbClr val="0B3D2E"/>
                 </a:solidFill>
               </a:rPr>
-              <a:t>⚠️ Errores comunes</a:t>
+              <a:t>🧰 Herramientas y preparación</a:t>
             </a:r>
           </a:p>
         </p:txBody>
@@ -3236,67 +3241,82 @@
                   <a:srgbClr val="22282E"/>
                 </a:solidFill>
               </a:rPr>
-              <a:t>•  El honeypot se usa como trampolín — Mala segmentación; aíslalo en VLAN sin acceso lateral</a:t>
-            </a:r>
-          </a:p>
-          <a:p>
-            <a:pPr>
-              <a:spcAft>
-                <a:spcPts val="600"/>
-              </a:spcAft>
-            </a:pPr>
-            <a:r>
-              <a:rPr sz="1500">
-                <a:solidFill>
-                  <a:srgbClr val="22282E"/>
-                </a:solidFill>
-              </a:rPr>
-              <a:t>•  Falsos positivos en cuenta trampa — Un escáner de inventario la tocó; excluye esas herramientas o ajusta</a:t>
-            </a:r>
-          </a:p>
-          <a:p>
-            <a:pPr>
-              <a:spcAft>
-                <a:spcPts val="600"/>
-              </a:spcAft>
-            </a:pPr>
-            <a:r>
-              <a:rPr sz="1500">
-                <a:solidFill>
-                  <a:srgbClr val="22282E"/>
-                </a:solidFill>
-              </a:rPr>
-              <a:t>•  Nadie ve las alertas del canary — No integradas al SIEM/notificación; enruta a máxima prioridad</a:t>
-            </a:r>
-          </a:p>
-          <a:p>
-            <a:pPr>
-              <a:spcAft>
-                <a:spcPts val="600"/>
-              </a:spcAft>
-            </a:pPr>
-            <a:r>
-              <a:rPr sz="1500">
-                <a:solidFill>
-                  <a:srgbClr val="22282E"/>
-                </a:solidFill>
-              </a:rPr>
-              <a:t>•  Honeytokens demasiado obvios — Nombres poco creíbles; imita la nomenclatura real de la empresa</a:t>
-            </a:r>
-          </a:p>
-          <a:p>
-            <a:pPr>
-              <a:spcAft>
-                <a:spcPts val="600"/>
-              </a:spcAft>
-            </a:pPr>
-            <a:r>
-              <a:rPr sz="1500">
-                <a:solidFill>
-                  <a:srgbClr val="22282E"/>
-                </a:solidFill>
-              </a:rPr>
-              <a:t>•  Deception olvidada — Señuelos caducan (credenciales rotan); revisa y renueva periódicamente</a:t>
+              <a:t>•  En laboratorio aislado y segmentado:</a:t>
+            </a:r>
+          </a:p>
+          <a:p>
+            <a:pPr>
+              <a:spcAft>
+                <a:spcPts val="600"/>
+              </a:spcAft>
+            </a:pPr>
+            <a:r>
+              <a:rPr sz="1500">
+                <a:solidFill>
+                  <a:srgbClr val="22282E"/>
+                </a:solidFill>
+              </a:rPr>
+              <a:t>•  T-Pot o honeypots individuales (Cowrie para SSH/Telnet, Dionaea para malware).</a:t>
+            </a:r>
+          </a:p>
+          <a:p>
+            <a:pPr>
+              <a:spcAft>
+                <a:spcPts val="600"/>
+              </a:spcAft>
+            </a:pPr>
+            <a:r>
+              <a:rPr sz="1500">
+                <a:solidFill>
+                  <a:srgbClr val="22282E"/>
+                </a:solidFill>
+              </a:rPr>
+              <a:t>•  Canarytokens (proyecto open source de Thinkst) para tokens de documento, DNS y AWS.</a:t>
+            </a:r>
+          </a:p>
+          <a:p>
+            <a:pPr>
+              <a:spcAft>
+                <a:spcPts val="600"/>
+              </a:spcAft>
+            </a:pPr>
+            <a:r>
+              <a:rPr sz="1500">
+                <a:solidFill>
+                  <a:srgbClr val="22282E"/>
+                </a:solidFill>
+              </a:rPr>
+              <a:t>•  Cuentas trampa en tu AD de laboratorio con auditoría de logon.</a:t>
+            </a:r>
+          </a:p>
+          <a:p>
+            <a:pPr>
+              <a:spcAft>
+                <a:spcPts val="600"/>
+              </a:spcAft>
+            </a:pPr>
+            <a:r>
+              <a:rPr sz="1500">
+                <a:solidFill>
+                  <a:srgbClr val="22282E"/>
+                </a:solidFill>
+              </a:rPr>
+              <a:t>•  Tu SIEM para centralizar las alertas de los señuelos.</a:t>
+            </a:r>
+          </a:p>
+          <a:p>
+            <a:pPr>
+              <a:spcAft>
+                <a:spcPts val="600"/>
+              </a:spcAft>
+            </a:pPr>
+            <a:r>
+              <a:rPr sz="1500">
+                <a:solidFill>
+                  <a:srgbClr val="22282E"/>
+                </a:solidFill>
+              </a:rPr>
+              <a:t>•  Aísla los honeypots del resto de la red para que, si son comprometidos, no sirvan de trampolín.</a:t>
             </a:r>
           </a:p>
         </p:txBody>
@@ -3347,7 +3367,7 @@
                   <a:srgbClr val="0B3D2E"/>
                 </a:solidFill>
               </a:rPr>
-              <a:t>❓ Preguntas frecuentes</a:t>
+              <a:t>🧪 Laboratorio guiado — Siembra señuelos y escucha</a:t>
             </a:r>
           </a:p>
         </p:txBody>
@@ -3385,82 +3405,97 @@
                   <a:srgbClr val="22282E"/>
                 </a:solidFill>
               </a:rPr>
-              <a:t>•  ❓ ¿La deception reemplaza a las detecciones normales?</a:t>
-            </a:r>
-          </a:p>
-          <a:p>
-            <a:pPr>
-              <a:spcAft>
-                <a:spcPts val="600"/>
-              </a:spcAft>
-            </a:pPr>
-            <a:r>
-              <a:rPr sz="1500">
-                <a:solidFill>
-                  <a:srgbClr val="22282E"/>
-                </a:solidFill>
-              </a:rPr>
-              <a:t>•  No. Es una capa complementaria de altísima fidelidad. Detecta a quien ya está dentro y explorando, pero no ve todo; se combina con SIEM, EDR y hunting.</a:t>
-            </a:r>
-          </a:p>
-          <a:p>
-            <a:pPr>
-              <a:spcAft>
-                <a:spcPts val="600"/>
-              </a:spcAft>
-            </a:pPr>
-            <a:r>
-              <a:rPr sz="1500">
-                <a:solidFill>
-                  <a:srgbClr val="22282E"/>
-                </a:solidFill>
-              </a:rPr>
-              <a:t>•  ❓ ¿No es peligroso poner un honeypot?</a:t>
-            </a:r>
-          </a:p>
-          <a:p>
-            <a:pPr>
-              <a:spcAft>
-                <a:spcPts val="600"/>
-              </a:spcAft>
-            </a:pPr>
-            <a:r>
-              <a:rPr sz="1500">
-                <a:solidFill>
-                  <a:srgbClr val="22282E"/>
-                </a:solidFill>
-              </a:rPr>
-              <a:t>•  Solo si está mal segmentado. Un honeypot aislado, con salida controlada, es seguro. El riesgo aparece cuando puede pivotar hacia la red real.</a:t>
-            </a:r>
-          </a:p>
-          <a:p>
-            <a:pPr>
-              <a:spcAft>
-                <a:spcPts val="600"/>
-              </a:spcAft>
-            </a:pPr>
-            <a:r>
-              <a:rPr sz="1500">
-                <a:solidFill>
-                  <a:srgbClr val="22282E"/>
-                </a:solidFill>
-              </a:rPr>
-              <a:t>•  ❓ ¿Los honeytokens requieren infraestructura?</a:t>
-            </a:r>
-          </a:p>
-          <a:p>
-            <a:pPr>
-              <a:spcAft>
-                <a:spcPts val="600"/>
-              </a:spcAft>
-            </a:pPr>
-            <a:r>
-              <a:rPr sz="1500">
-                <a:solidFill>
-                  <a:srgbClr val="22282E"/>
-                </a:solidFill>
-              </a:rPr>
-              <a:t>•  Casi nada. Un canary token es un archivo, una URL o una clave que avisa al usarse. Es de las detecciones más baratas y efectivas que existen.</a:t>
+              <a:t>•  Despliega un honeypot SSH. Levanta Cowrie en una VM aislada; confirma que registra intentos de login y comandos.</a:t>
+            </a:r>
+          </a:p>
+          <a:p>
+            <a:pPr>
+              <a:spcAft>
+                <a:spcPts val="600"/>
+              </a:spcAft>
+            </a:pPr>
+            <a:r>
+              <a:rPr sz="1500">
+                <a:solidFill>
+                  <a:srgbClr val="22282E"/>
+                </a:solidFill>
+              </a:rPr>
+              <a:t>•  Segmenta. Coloca el honeypot en una VLAN aislada con salida controlada para que no pueda pivotar.</a:t>
+            </a:r>
+          </a:p>
+          <a:p>
+            <a:pPr>
+              <a:spcAft>
+                <a:spcPts val="600"/>
+              </a:spcAft>
+            </a:pPr>
+            <a:r>
+              <a:rPr sz="1500">
+                <a:solidFill>
+                  <a:srgbClr val="22282E"/>
+                </a:solidFill>
+              </a:rPr>
+              <a:t>•  Genera un canary token. Crea un documento Word/Excel con Canarytokens y colócalo con un nombre atractivo ("nóminas2026.xlsx").</a:t>
+            </a:r>
+          </a:p>
+          <a:p>
+            <a:pPr>
+              <a:spcAft>
+                <a:spcPts val="600"/>
+              </a:spcAft>
+            </a:pPr>
+            <a:r>
+              <a:rPr sz="1500">
+                <a:solidFill>
+                  <a:srgbClr val="22282E"/>
+                </a:solidFill>
+              </a:rPr>
+              <a:t>•  Crea una cuenta trampa. En el AD de laboratorio, añade "svcbackupadmin" con auditoría de logon y sin uso legítimo.</a:t>
+            </a:r>
+          </a:p>
+          <a:p>
+            <a:pPr>
+              <a:spcAft>
+                <a:spcPts val="600"/>
+              </a:spcAft>
+            </a:pPr>
+            <a:r>
+              <a:rPr sz="1500">
+                <a:solidFill>
+                  <a:srgbClr val="22282E"/>
+                </a:solidFill>
+              </a:rPr>
+              <a:t>•  Simula el intruso. Desde otra VM, sondea el honeypot, abre el documento cebo y usa la cuenta trampa.</a:t>
+            </a:r>
+          </a:p>
+          <a:p>
+            <a:pPr>
+              <a:spcAft>
+                <a:spcPts val="600"/>
+              </a:spcAft>
+            </a:pPr>
+            <a:r>
+              <a:rPr sz="1500">
+                <a:solidFill>
+                  <a:srgbClr val="22282E"/>
+                </a:solidFill>
+              </a:rPr>
+              <a:t>•  Verifica las alertas. Confirma que cada interacción genera una señal: eventos de Cowrie, aviso del canary token, 4624/4625 de la cuenta trampa.</a:t>
+            </a:r>
+          </a:p>
+          <a:p>
+            <a:pPr>
+              <a:spcAft>
+                <a:spcPts val="600"/>
+              </a:spcAft>
+            </a:pPr>
+            <a:r>
+              <a:rPr sz="1500">
+                <a:solidFill>
+                  <a:srgbClr val="22282E"/>
+                </a:solidFill>
+              </a:rPr>
+              <a:t>•  Integra en el SIEM. Enruta todas estas señales a una regla de máxima prioridad ("cualquier toque = incidente").</a:t>
             </a:r>
           </a:p>
         </p:txBody>
@@ -3511,7 +3546,7 @@
                   <a:srgbClr val="0B3D2E"/>
                 </a:solidFill>
               </a:rPr>
-              <a:t>🔗 Referencias</a:t>
+              <a:t>✍️ Ejercicios</a:t>
             </a:r>
           </a:p>
         </p:txBody>
@@ -3549,71 +3584,727 @@
                   <a:srgbClr val="22282E"/>
                 </a:solidFill>
               </a:rPr>
-              <a:t>•  Bejtlich, R. The Practice of Network Security Monitoring. No Starch Press.</a:t>
-            </a:r>
-          </a:p>
-          <a:p>
-            <a:pPr>
-              <a:spcAft>
-                <a:spcPts val="600"/>
-              </a:spcAft>
-            </a:pPr>
-            <a:r>
-              <a:rPr sz="1500">
-                <a:solidFill>
-                  <a:srgbClr val="22282E"/>
-                </a:solidFill>
-              </a:rPr>
-              <a:t>•  Canarytokens (Thinkst) — &lt;https://canarytokens.org/&gt;</a:t>
-            </a:r>
-          </a:p>
-          <a:p>
-            <a:pPr>
-              <a:spcAft>
-                <a:spcPts val="600"/>
-              </a:spcAft>
-            </a:pPr>
-            <a:r>
-              <a:rPr sz="1500">
-                <a:solidFill>
-                  <a:srgbClr val="22282E"/>
-                </a:solidFill>
-              </a:rPr>
-              <a:t>•  Cowrie SSH/Telnet honeypot — &lt;https://github.com/cowrie/cowrie&gt;</a:t>
-            </a:r>
-          </a:p>
-          <a:p>
-            <a:pPr>
-              <a:spcAft>
-                <a:spcPts val="600"/>
-              </a:spcAft>
-            </a:pPr>
-            <a:r>
-              <a:rPr sz="1500">
-                <a:solidFill>
-                  <a:srgbClr val="22282E"/>
-                </a:solidFill>
-              </a:rPr>
-              <a:t>•  T-Pot honeypot platform — &lt;https://github.com/telekom-security/tpotce&gt;</a:t>
-            </a:r>
-          </a:p>
-          <a:p>
-            <a:pPr>
-              <a:spcAft>
-                <a:spcPts val="600"/>
-              </a:spcAft>
-            </a:pPr>
-            <a:r>
-              <a:rPr sz="1500">
-                <a:solidFill>
-                  <a:srgbClr val="22282E"/>
-                </a:solidFill>
-              </a:rPr>
-              <a:t>•  MITRE Engage (deception framework) — &lt;https://engage.mitre.org/&gt;</a:t>
-            </a:r>
-          </a:p>
-        </p:txBody>
-      </p:sp>
+              <a:t>•  Compara honeypot de baja y alta interacción con pros/contras.</a:t>
+            </a:r>
+          </a:p>
+          <a:p>
+            <a:pPr>
+              <a:spcAft>
+                <a:spcPts val="600"/>
+              </a:spcAft>
+            </a:pPr>
+            <a:r>
+              <a:rPr sz="1500">
+                <a:solidFill>
+                  <a:srgbClr val="22282E"/>
+                </a:solidFill>
+              </a:rPr>
+              <a:t>•  Diseña la colocación de 3 honeytokens en una red corporativa típica.</a:t>
+            </a:r>
+          </a:p>
+          <a:p>
+            <a:pPr>
+              <a:spcAft>
+                <a:spcPts val="600"/>
+              </a:spcAft>
+            </a:pPr>
+            <a:r>
+              <a:rPr sz="1500">
+                <a:solidFill>
+                  <a:srgbClr val="22282E"/>
+                </a:solidFill>
+              </a:rPr>
+              <a:t>•  Crea una cuenta trampa y su regla de alerta de máxima prioridad.</a:t>
+            </a:r>
+          </a:p>
+          <a:p>
+            <a:pPr>
+              <a:spcAft>
+                <a:spcPts val="600"/>
+              </a:spcAft>
+            </a:pPr>
+            <a:r>
+              <a:rPr sz="1500">
+                <a:solidFill>
+                  <a:srgbClr val="22282E"/>
+                </a:solidFill>
+              </a:rPr>
+              <a:t>•  Explica por qué las señales de deception tienen tan pocos falsos positivos.</a:t>
+            </a:r>
+          </a:p>
+          <a:p>
+            <a:pPr>
+              <a:spcAft>
+                <a:spcPts val="600"/>
+              </a:spcAft>
+            </a:pPr>
+            <a:r>
+              <a:rPr sz="1500">
+                <a:solidFill>
+                  <a:srgbClr val="22282E"/>
+                </a:solidFill>
+              </a:rPr>
+              <a:t>•  Enumera 3 riesgos de un honeypot mal segmentado y su mitigación.</a:t>
+            </a:r>
+          </a:p>
+          <a:p>
+            <a:pPr>
+              <a:spcAft>
+                <a:spcPts val="600"/>
+              </a:spcAft>
+            </a:pPr>
+            <a:r>
+              <a:rPr sz="1500">
+                <a:solidFill>
+                  <a:srgbClr val="22282E"/>
+                </a:solidFill>
+              </a:rPr>
+              <a:t>•  Diseña un canary token para detectar acceso no autorizado a un repositorio.</a:t>
+            </a:r>
+          </a:p>
+        </p:txBody>
+      </p:sp>
+    </p:spTree>
+  </p:cSld>
+  <p:clrMapOvr>
+    <a:masterClrMapping/>
+  </p:clrMapOvr>
+</p:sld>
+</file>
+
+<file path=ppt/slides/slide13.xml><?xml version="1.0" encoding="utf-8"?>
+<p:sld xmlns:a="http://schemas.openxmlformats.org/drawingml/2006/main" xmlns:p="http://schemas.openxmlformats.org/presentationml/2006/main" xmlns:r="http://schemas.openxmlformats.org/officeDocument/2006/relationships">
+  <p:cSld>
+    <p:spTree>
+      <p:nvGrpSpPr>
+        <p:cNvPr id="1" name=""/>
+        <p:cNvGrpSpPr/>
+        <p:nvPr/>
+      </p:nvGrpSpPr>
+      <p:grpSpPr/>
+      <p:sp>
+        <p:nvSpPr>
+          <p:cNvPr id="2" name="TextBox 1"/>
+          <p:cNvSpPr txBox="1"/>
+          <p:nvPr/>
+        </p:nvSpPr>
+        <p:spPr>
+          <a:xfrm>
+            <a:off x="457200" y="320040"/>
+            <a:ext cx="8229600" cy="822960"/>
+          </a:xfrm>
+          <a:prstGeom prst="rect">
+            <a:avLst/>
+          </a:prstGeom>
+          <a:noFill/>
+        </p:spPr>
+        <p:txBody>
+          <a:bodyPr wrap="square">
+            <a:spAutoFit/>
+          </a:bodyPr>
+          <a:lstStyle/>
+          <a:p>
+            <a:r>
+              <a:rPr sz="2600" b="1">
+                <a:solidFill>
+                  <a:srgbClr val="0B3D2E"/>
+                </a:solidFill>
+              </a:rPr>
+              <a:t>📝 Reto verificable</a:t>
+            </a:r>
+          </a:p>
+        </p:txBody>
+      </p:sp>
+      <p:sp>
+        <p:nvSpPr>
+          <p:cNvPr id="3" name="TextBox 2"/>
+          <p:cNvSpPr txBox="1"/>
+          <p:nvPr/>
+        </p:nvSpPr>
+        <p:spPr>
+          <a:xfrm>
+            <a:off x="457200" y="1280160"/>
+            <a:ext cx="8229600" cy="4937760"/>
+          </a:xfrm>
+          <a:prstGeom prst="rect">
+            <a:avLst/>
+          </a:prstGeom>
+          <a:noFill/>
+        </p:spPr>
+        <p:txBody>
+          <a:bodyPr wrap="square">
+            <a:spAutoFit/>
+          </a:bodyPr>
+          <a:lstStyle/>
+          <a:p>
+            <a:pPr>
+              <a:spcAft>
+                <a:spcPts val="600"/>
+              </a:spcAft>
+            </a:pPr>
+            <a:r>
+              <a:rPr sz="1500">
+                <a:solidFill>
+                  <a:srgbClr val="22282E"/>
+                </a:solidFill>
+              </a:rPr>
+              <a:t>•  Despliega al menos dos mecanismos de deception (p. ej. un honeypot y un honeytoken/cuenta trampa) e intégralos al SIEM con alertas de alta prioridad. Criterio de aceptación: cada interacción simulada…</a:t>
+            </a:r>
+          </a:p>
+        </p:txBody>
+      </p:sp>
+    </p:spTree>
+  </p:cSld>
+  <p:clrMapOvr>
+    <a:masterClrMapping/>
+  </p:clrMapOvr>
+</p:sld>
+</file>
+
+<file path=ppt/slides/slide14.xml><?xml version="1.0" encoding="utf-8"?>
+<p:sld xmlns:a="http://schemas.openxmlformats.org/drawingml/2006/main" xmlns:p="http://schemas.openxmlformats.org/presentationml/2006/main" xmlns:r="http://schemas.openxmlformats.org/officeDocument/2006/relationships">
+  <p:cSld>
+    <p:spTree>
+      <p:nvGrpSpPr>
+        <p:cNvPr id="1" name=""/>
+        <p:cNvGrpSpPr/>
+        <p:nvPr/>
+      </p:nvGrpSpPr>
+      <p:grpSpPr/>
+      <p:sp>
+        <p:nvSpPr>
+          <p:cNvPr id="2" name="TextBox 1"/>
+          <p:cNvSpPr txBox="1"/>
+          <p:nvPr/>
+        </p:nvSpPr>
+        <p:spPr>
+          <a:xfrm>
+            <a:off x="457200" y="320040"/>
+            <a:ext cx="8229600" cy="822960"/>
+          </a:xfrm>
+          <a:prstGeom prst="rect">
+            <a:avLst/>
+          </a:prstGeom>
+          <a:noFill/>
+        </p:spPr>
+        <p:txBody>
+          <a:bodyPr wrap="square">
+            <a:spAutoFit/>
+          </a:bodyPr>
+          <a:lstStyle/>
+          <a:p>
+            <a:r>
+              <a:rPr sz="2600" b="1">
+                <a:solidFill>
+                  <a:srgbClr val="0B3D2E"/>
+                </a:solidFill>
+              </a:rPr>
+              <a:t>⚠️ Errores comunes</a:t>
+            </a:r>
+          </a:p>
+        </p:txBody>
+      </p:sp>
+      <p:sp>
+        <p:nvSpPr>
+          <p:cNvPr id="3" name="TextBox 2"/>
+          <p:cNvSpPr txBox="1"/>
+          <p:nvPr/>
+        </p:nvSpPr>
+        <p:spPr>
+          <a:xfrm>
+            <a:off x="457200" y="1280160"/>
+            <a:ext cx="8229600" cy="4937760"/>
+          </a:xfrm>
+          <a:prstGeom prst="rect">
+            <a:avLst/>
+          </a:prstGeom>
+          <a:noFill/>
+        </p:spPr>
+        <p:txBody>
+          <a:bodyPr wrap="square">
+            <a:spAutoFit/>
+          </a:bodyPr>
+          <a:lstStyle/>
+          <a:p>
+            <a:pPr>
+              <a:spcAft>
+                <a:spcPts val="600"/>
+              </a:spcAft>
+            </a:pPr>
+            <a:r>
+              <a:rPr sz="1500">
+                <a:solidFill>
+                  <a:srgbClr val="22282E"/>
+                </a:solidFill>
+              </a:rPr>
+              <a:t>•  El honeypot se usa como trampolín — Mala segmentación; aíslalo en VLAN sin acceso lateral</a:t>
+            </a:r>
+          </a:p>
+          <a:p>
+            <a:pPr>
+              <a:spcAft>
+                <a:spcPts val="600"/>
+              </a:spcAft>
+            </a:pPr>
+            <a:r>
+              <a:rPr sz="1500">
+                <a:solidFill>
+                  <a:srgbClr val="22282E"/>
+                </a:solidFill>
+              </a:rPr>
+              <a:t>•  Falsos positivos en cuenta trampa — Un escáner de inventario la tocó; excluye esas herramientas o ajusta</a:t>
+            </a:r>
+          </a:p>
+          <a:p>
+            <a:pPr>
+              <a:spcAft>
+                <a:spcPts val="600"/>
+              </a:spcAft>
+            </a:pPr>
+            <a:r>
+              <a:rPr sz="1500">
+                <a:solidFill>
+                  <a:srgbClr val="22282E"/>
+                </a:solidFill>
+              </a:rPr>
+              <a:t>•  Nadie ve las alertas del canary — No integradas al SIEM/notificación; enruta a máxima prioridad</a:t>
+            </a:r>
+          </a:p>
+          <a:p>
+            <a:pPr>
+              <a:spcAft>
+                <a:spcPts val="600"/>
+              </a:spcAft>
+            </a:pPr>
+            <a:r>
+              <a:rPr sz="1500">
+                <a:solidFill>
+                  <a:srgbClr val="22282E"/>
+                </a:solidFill>
+              </a:rPr>
+              <a:t>•  Honeytokens demasiado obvios — Nombres poco creíbles; imita la nomenclatura real de la empresa</a:t>
+            </a:r>
+          </a:p>
+          <a:p>
+            <a:pPr>
+              <a:spcAft>
+                <a:spcPts val="600"/>
+              </a:spcAft>
+            </a:pPr>
+            <a:r>
+              <a:rPr sz="1500">
+                <a:solidFill>
+                  <a:srgbClr val="22282E"/>
+                </a:solidFill>
+              </a:rPr>
+              <a:t>•  Deception olvidada — Señuelos caducan (credenciales rotan); revisa y renueva periódicamente</a:t>
+            </a:r>
+          </a:p>
+        </p:txBody>
+      </p:sp>
+    </p:spTree>
+  </p:cSld>
+  <p:clrMapOvr>
+    <a:masterClrMapping/>
+  </p:clrMapOvr>
+</p:sld>
+</file>
+
+<file path=ppt/slides/slide15.xml><?xml version="1.0" encoding="utf-8"?>
+<p:sld xmlns:a="http://schemas.openxmlformats.org/drawingml/2006/main" xmlns:p="http://schemas.openxmlformats.org/presentationml/2006/main" xmlns:r="http://schemas.openxmlformats.org/officeDocument/2006/relationships">
+  <p:cSld>
+    <p:spTree>
+      <p:nvGrpSpPr>
+        <p:cNvPr id="1" name=""/>
+        <p:cNvGrpSpPr/>
+        <p:nvPr/>
+      </p:nvGrpSpPr>
+      <p:grpSpPr/>
+      <p:sp>
+        <p:nvSpPr>
+          <p:cNvPr id="2" name="TextBox 1"/>
+          <p:cNvSpPr txBox="1"/>
+          <p:nvPr/>
+        </p:nvSpPr>
+        <p:spPr>
+          <a:xfrm>
+            <a:off x="457200" y="320040"/>
+            <a:ext cx="8229600" cy="822960"/>
+          </a:xfrm>
+          <a:prstGeom prst="rect">
+            <a:avLst/>
+          </a:prstGeom>
+          <a:noFill/>
+        </p:spPr>
+        <p:txBody>
+          <a:bodyPr wrap="square">
+            <a:spAutoFit/>
+          </a:bodyPr>
+          <a:lstStyle/>
+          <a:p>
+            <a:r>
+              <a:rPr sz="2600" b="1">
+                <a:solidFill>
+                  <a:srgbClr val="0B3D2E"/>
+                </a:solidFill>
+              </a:rPr>
+              <a:t>❓ Preguntas frecuentes</a:t>
+            </a:r>
+          </a:p>
+        </p:txBody>
+      </p:sp>
+      <p:sp>
+        <p:nvSpPr>
+          <p:cNvPr id="3" name="TextBox 2"/>
+          <p:cNvSpPr txBox="1"/>
+          <p:nvPr/>
+        </p:nvSpPr>
+        <p:spPr>
+          <a:xfrm>
+            <a:off x="457200" y="1280160"/>
+            <a:ext cx="8229600" cy="4937760"/>
+          </a:xfrm>
+          <a:prstGeom prst="rect">
+            <a:avLst/>
+          </a:prstGeom>
+          <a:noFill/>
+        </p:spPr>
+        <p:txBody>
+          <a:bodyPr wrap="square">
+            <a:spAutoFit/>
+          </a:bodyPr>
+          <a:lstStyle/>
+          <a:p>
+            <a:pPr>
+              <a:spcAft>
+                <a:spcPts val="600"/>
+              </a:spcAft>
+            </a:pPr>
+            <a:r>
+              <a:rPr sz="1500">
+                <a:solidFill>
+                  <a:srgbClr val="22282E"/>
+                </a:solidFill>
+              </a:rPr>
+              <a:t>•  ❓ ¿La deception reemplaza a las detecciones normales?</a:t>
+            </a:r>
+          </a:p>
+          <a:p>
+            <a:pPr>
+              <a:spcAft>
+                <a:spcPts val="600"/>
+              </a:spcAft>
+            </a:pPr>
+            <a:r>
+              <a:rPr sz="1500">
+                <a:solidFill>
+                  <a:srgbClr val="22282E"/>
+                </a:solidFill>
+              </a:rPr>
+              <a:t>•  No. Es una capa complementaria cuya selectividad depende del diseño y de controlar accesos legítimos. Solo observa interacciones con los señuelos desplegados; se combina con SIEM, EDR, telemetría de…</a:t>
+            </a:r>
+          </a:p>
+          <a:p>
+            <a:pPr>
+              <a:spcAft>
+                <a:spcPts val="600"/>
+              </a:spcAft>
+            </a:pPr>
+            <a:r>
+              <a:rPr sz="1500">
+                <a:solidFill>
+                  <a:srgbClr val="22282E"/>
+                </a:solidFill>
+              </a:rPr>
+              <a:t>•  ❓ ¿No es peligroso poner un honeypot?</a:t>
+            </a:r>
+          </a:p>
+          <a:p>
+            <a:pPr>
+              <a:spcAft>
+                <a:spcPts val="600"/>
+              </a:spcAft>
+            </a:pPr>
+            <a:r>
+              <a:rPr sz="1500">
+                <a:solidFill>
+                  <a:srgbClr val="22282E"/>
+                </a:solidFill>
+              </a:rPr>
+              <a:t>•  Solo si está mal segmentado. Un honeypot aislado, con salida controlada, es seguro. El riesgo aparece cuando puede pivotar hacia la red real.</a:t>
+            </a:r>
+          </a:p>
+          <a:p>
+            <a:pPr>
+              <a:spcAft>
+                <a:spcPts val="600"/>
+              </a:spcAft>
+            </a:pPr>
+            <a:r>
+              <a:rPr sz="1500">
+                <a:solidFill>
+                  <a:srgbClr val="22282E"/>
+                </a:solidFill>
+              </a:rPr>
+              <a:t>•  ❓ ¿Los honeytokens requieren infraestructura?</a:t>
+            </a:r>
+          </a:p>
+          <a:p>
+            <a:pPr>
+              <a:spcAft>
+                <a:spcPts val="600"/>
+              </a:spcAft>
+            </a:pPr>
+            <a:r>
+              <a:rPr sz="1500">
+                <a:solidFill>
+                  <a:srgbClr val="22282E"/>
+                </a:solidFill>
+              </a:rPr>
+              <a:t>•  Casi nada. Un canary token es un archivo, una URL o una clave que avisa al usarse. Es de las detecciones más baratas y efectivas que existen.</a:t>
+            </a:r>
+          </a:p>
+        </p:txBody>
+      </p:sp>
+    </p:spTree>
+  </p:cSld>
+  <p:clrMapOvr>
+    <a:masterClrMapping/>
+  </p:clrMapOvr>
+</p:sld>
+</file>
+
+<file path=ppt/slides/slide16.xml><?xml version="1.0" encoding="utf-8"?>
+<p:sld xmlns:a="http://schemas.openxmlformats.org/drawingml/2006/main" xmlns:p="http://schemas.openxmlformats.org/presentationml/2006/main" xmlns:r="http://schemas.openxmlformats.org/officeDocument/2006/relationships">
+  <p:cSld>
+    <p:spTree>
+      <p:nvGrpSpPr>
+        <p:cNvPr id="1" name=""/>
+        <p:cNvGrpSpPr/>
+        <p:nvPr/>
+      </p:nvGrpSpPr>
+      <p:grpSpPr/>
+      <p:sp>
+        <p:nvSpPr>
+          <p:cNvPr id="2" name="TextBox 1"/>
+          <p:cNvSpPr txBox="1"/>
+          <p:nvPr/>
+        </p:nvSpPr>
+        <p:spPr>
+          <a:xfrm>
+            <a:off x="457200" y="320040"/>
+            <a:ext cx="8229600" cy="822960"/>
+          </a:xfrm>
+          <a:prstGeom prst="rect">
+            <a:avLst/>
+          </a:prstGeom>
+          <a:noFill/>
+        </p:spPr>
+        <p:txBody>
+          <a:bodyPr wrap="square">
+            <a:spAutoFit/>
+          </a:bodyPr>
+          <a:lstStyle/>
+          <a:p>
+            <a:r>
+              <a:rPr sz="2600" b="1">
+                <a:solidFill>
+                  <a:srgbClr val="0B3D2E"/>
+                </a:solidFill>
+              </a:rPr>
+              <a:t>🔗 Referencias verificables y alcance</a:t>
+            </a:r>
+          </a:p>
+        </p:txBody>
+      </p:sp>
+      <p:sp>
+        <p:nvSpPr>
+          <p:cNvPr id="3" name="TextBox 2"/>
+          <p:cNvSpPr txBox="1"/>
+          <p:nvPr/>
+        </p:nvSpPr>
+        <p:spPr>
+          <a:xfrm>
+            <a:off x="457200" y="1280160"/>
+            <a:ext cx="8229600" cy="4937760"/>
+          </a:xfrm>
+          <a:prstGeom prst="rect">
+            <a:avLst/>
+          </a:prstGeom>
+          <a:noFill/>
+        </p:spPr>
+        <p:txBody>
+          <a:bodyPr wrap="square">
+            <a:spAutoFit/>
+          </a:bodyPr>
+          <a:lstStyle/>
+          <a:p>
+            <a:pPr>
+              <a:spcAft>
+                <a:spcPts val="600"/>
+              </a:spcAft>
+            </a:pPr>
+            <a:r>
+              <a:rPr sz="1500">
+                <a:solidFill>
+                  <a:srgbClr val="22282E"/>
+                </a:solidFill>
+              </a:rPr>
+              <a:t>•  MITRE Engage: marco oficial para planificar y analizar adversary engagement; se usa para objetivos, riesgos y operación del engaño — &lt;https://engage.mitre.org/&gt;</a:t>
+            </a:r>
+          </a:p>
+          <a:p>
+            <a:pPr>
+              <a:spcAft>
+                <a:spcPts val="600"/>
+              </a:spcAft>
+            </a:pPr>
+            <a:r>
+              <a:rPr sz="1500">
+                <a:solidFill>
+                  <a:srgbClr val="22282E"/>
+                </a:solidFill>
+              </a:rPr>
+              <a:t>•  MITRE, A Practical Guide to Adversary Engagement: guía primaria del proceso de planificación; no convierte toda interacción con un señuelo en incidente confirmado —…</a:t>
+            </a:r>
+          </a:p>
+          <a:p>
+            <a:pPr>
+              <a:spcAft>
+                <a:spcPts val="600"/>
+              </a:spcAft>
+            </a:pPr>
+            <a:r>
+              <a:rPr sz="1500">
+                <a:solidFill>
+                  <a:srgbClr val="22282E"/>
+                </a:solidFill>
+              </a:rPr>
+              <a:t>•  Canarytokens (Thinkst): implementación mantenida por su proveedor para generar tokens del laboratorio — &lt;https://canarytokens.org/&gt;</a:t>
+            </a:r>
+          </a:p>
+          <a:p>
+            <a:pPr>
+              <a:spcAft>
+                <a:spcPts val="600"/>
+              </a:spcAft>
+            </a:pPr>
+            <a:r>
+              <a:rPr sz="1500">
+                <a:solidFill>
+                  <a:srgbClr val="22282E"/>
+                </a:solidFill>
+              </a:rPr>
+              <a:t>•  Cowrie: repositorio oficial del proyecto SSH/Telnet honeypot; respalda su instalación y capacidades concretas — &lt;https://github.com/cowrie/cowrie&gt;</a:t>
+            </a:r>
+          </a:p>
+          <a:p>
+            <a:pPr>
+              <a:spcAft>
+                <a:spcPts val="600"/>
+              </a:spcAft>
+            </a:pPr>
+            <a:r>
+              <a:rPr sz="1500">
+                <a:solidFill>
+                  <a:srgbClr val="22282E"/>
+                </a:solidFill>
+              </a:rPr>
+              <a:t>•  T-Pot: repositorio oficial de la plataforma para estudiar un despliegue multi-honeypot — &lt;https://github.com/telekom-security/tpotce&gt;</a:t>
+            </a:r>
+          </a:p>
+          <a:p>
+            <a:pPr>
+              <a:spcAft>
+                <a:spcPts val="600"/>
+              </a:spcAft>
+            </a:pPr>
+            <a:r>
+              <a:rPr sz="1500">
+                <a:solidFill>
+                  <a:srgbClr val="22282E"/>
+                </a:solidFill>
+              </a:rPr>
+              <a:t>•  Bejtlich, R. The Practice of Network Security Monitoring. No Starch Press: bibliografía complementaria sobre monitoreo y evidencia de red.</a:t>
+            </a:r>
+          </a:p>
+        </p:txBody>
+      </p:sp>
+    </p:spTree>
+  </p:cSld>
+  <p:clrMapOvr>
+    <a:masterClrMapping/>
+  </p:clrMapOvr>
+</p:sld>
+</file>
+
+<file path=ppt/slides/slide17.xml><?xml version="1.0" encoding="utf-8"?>
+<p:sld xmlns:a="http://schemas.openxmlformats.org/drawingml/2006/main" xmlns:p="http://schemas.openxmlformats.org/presentationml/2006/main" xmlns:r="http://schemas.openxmlformats.org/officeDocument/2006/relationships">
+  <p:cSld>
+    <p:spTree>
+      <p:nvGrpSpPr>
+        <p:cNvPr id="1" name=""/>
+        <p:cNvGrpSpPr/>
+        <p:nvPr/>
+      </p:nvGrpSpPr>
+      <p:grpSpPr/>
+      <p:sp>
+        <p:nvSpPr>
+          <p:cNvPr id="2" name="TextBox 1"/>
+          <p:cNvSpPr txBox="1"/>
+          <p:nvPr/>
+        </p:nvSpPr>
+        <p:spPr>
+          <a:xfrm>
+            <a:off x="457200" y="274320"/>
+            <a:ext cx="8229600" cy="640080"/>
+          </a:xfrm>
+          <a:prstGeom prst="rect">
+            <a:avLst/>
+          </a:prstGeom>
+          <a:noFill/>
+        </p:spPr>
+        <p:txBody>
+          <a:bodyPr wrap="square">
+            <a:spAutoFit/>
+          </a:bodyPr>
+          <a:lstStyle/>
+          <a:p>
+            <a:r>
+              <a:rPr sz="2200" b="1">
+                <a:solidFill>
+                  <a:srgbClr val="0B3D2E"/>
+                </a:solidFill>
+              </a:rPr>
+              <a:t>Diagrama de la clase</a:t>
+            </a:r>
+          </a:p>
+        </p:txBody>
+      </p:sp>
+      <p:pic>
+        <p:nvPicPr>
+          <p:cNvPr id="3" name="Picture 2" descr="e326d3ef9424303c.png"/>
+          <p:cNvPicPr>
+            <a:picLocks noChangeAspect="1"/>
+          </p:cNvPicPr>
+          <p:nvPr/>
+        </p:nvPicPr>
+        <p:blipFill>
+          <a:blip r:embed="rId2"/>
+          <a:stretch>
+            <a:fillRect/>
+          </a:stretch>
+        </p:blipFill>
+        <p:spPr>
+          <a:xfrm>
+            <a:off x="457200" y="3300984"/>
+            <a:ext cx="8229600" cy="896112"/>
+          </a:xfrm>
+          <a:prstGeom prst="rect">
+            <a:avLst/>
+          </a:prstGeom>
+        </p:spPr>
+      </p:pic>
     </p:spTree>
   </p:cSld>
   <p:clrMapOvr>
@@ -3698,7 +4389,7 @@
                   <a:srgbClr val="22282E"/>
                 </a:solidFill>
               </a:rPr>
-              <a:t>•  Usar el engaño (deception) como fuente de detección de altísima fidelidad: honeypots, honeytokens y cuentas trampa que nadie legítimo debería tocar, de modo que cualquier interacción es, por definición, sospechosa. Aprenderás a desplegar señuelos, a colocar honeytokens en lugares estratégicos y a alertar sobre su uso.</a:t>
+              <a:t>•  Usar el engaño (deception) para crear señales deliberadamente selectivas: honeypots, honeytokens y cuentas trampa cuyo uso esperado debe ser nulo o muy limitado. Una interacción eleva la prioridad…</a:t>
             </a:r>
           </a:p>
         </p:txBody>
@@ -4092,7 +4783,7 @@
                   <a:srgbClr val="0B3D2E"/>
                 </a:solidFill>
               </a:rPr>
-              <a:t>📖 Definiciones y características</a:t>
+              <a:t>🧠 Explicación en profundidad</a:t>
             </a:r>
           </a:p>
         </p:txBody>
@@ -4130,97 +4821,97 @@
                   <a:srgbClr val="22282E"/>
                 </a:solidFill>
               </a:rPr>
-              <a:t>•  Honeypot: sistema señuelo sin propósito productivo, diseñado para ser sondeado. Característica: toda interacción es sospechosa por definición.</a:t>
-            </a:r>
-          </a:p>
-          <a:p>
-            <a:pPr>
-              <a:spcAft>
-                <a:spcPts val="600"/>
-              </a:spcAft>
-            </a:pPr>
-            <a:r>
-              <a:rPr sz="1500">
-                <a:solidFill>
-                  <a:srgbClr val="22282E"/>
-                </a:solidFill>
-              </a:rPr>
-              <a:t>•  Baja interacción: emula servicios (banners, puertos) sin un SO real. Característica: seguro y fácil, datos limitados.</a:t>
-            </a:r>
-          </a:p>
-          <a:p>
-            <a:pPr>
-              <a:spcAft>
-                <a:spcPts val="600"/>
-              </a:spcAft>
-            </a:pPr>
-            <a:r>
-              <a:rPr sz="1500">
-                <a:solidFill>
-                  <a:srgbClr val="22282E"/>
-                </a:solidFill>
-              </a:rPr>
-              <a:t>•  Alta interacción: SO/servicios reales controlados. Característica: datos ricos, mayor riesgo de ser abusado.</a:t>
-            </a:r>
-          </a:p>
-          <a:p>
-            <a:pPr>
-              <a:spcAft>
-                <a:spcPts val="600"/>
-              </a:spcAft>
-            </a:pPr>
-            <a:r>
-              <a:rPr sz="1500">
-                <a:solidFill>
-                  <a:srgbClr val="22282E"/>
-                </a:solidFill>
-              </a:rPr>
-              <a:t>•  Honeytoken: dato-cebo (credencial, archivo, URL, registro) cuya sola invocación dispara alerta. Característica: no requiere un host dedicado.</a:t>
-            </a:r>
-          </a:p>
-          <a:p>
-            <a:pPr>
-              <a:spcAft>
-                <a:spcPts val="600"/>
-              </a:spcAft>
-            </a:pPr>
-            <a:r>
-              <a:rPr sz="1500">
-                <a:solidFill>
-                  <a:srgbClr val="22282E"/>
-                </a:solidFill>
-              </a:rPr>
-              <a:t>•  Canary token: honeytoken que "avisa" al abrirse (documento, DNS, AWS key). Característica: telemetría de alta fidelidad y despliegue trivial.</a:t>
-            </a:r>
-          </a:p>
-          <a:p>
-            <a:pPr>
-              <a:spcAft>
-                <a:spcPts val="600"/>
-              </a:spcAft>
-            </a:pPr>
-            <a:r>
-              <a:rPr sz="1500">
-                <a:solidFill>
-                  <a:srgbClr val="22282E"/>
-                </a:solidFill>
-              </a:rPr>
-              <a:t>•  Cuenta trampa: usuario de AD atractivo (p. ej. "adminbackup") que nadie debe usar. Característica: cualquier logon con ella es incidente.</a:t>
-            </a:r>
-          </a:p>
-          <a:p>
-            <a:pPr>
-              <a:spcAft>
-                <a:spcPts val="600"/>
-              </a:spcAft>
-            </a:pPr>
-            <a:r>
-              <a:rPr sz="1500">
-                <a:solidFill>
-                  <a:srgbClr val="22282E"/>
-                </a:solidFill>
-              </a:rPr>
-              <a:t>•  Honeynet: red de honeypots interconectados. Característica: observa movimiento lateral del atacante.</a:t>
+              <a:t>•  Deception crea activos o datos instrumentados cuya interacción es improbable en operación normal. Produce señal de alta confianza, pero no cero falsos positivos: escáneres, administradores o…</a:t>
+            </a:r>
+          </a:p>
+          <a:p>
+            <a:pPr>
+              <a:spcAft>
+                <a:spcPts val="600"/>
+              </a:spcAft>
+            </a:pPr>
+            <a:r>
+              <a:rPr sz="1500">
+                <a:solidFill>
+                  <a:srgbClr val="22282E"/>
+                </a:solidFill>
+              </a:rPr>
+              <a:t>•  La interacción baja emula menos y reduce riesgo; la alta ofrece realismo y mayor superficie que contener. Un honeytoken no concede acceso real: usa identidad o secreto sintético, único, revocable y…</a:t>
+            </a:r>
+          </a:p>
+          <a:p>
+            <a:pPr>
+              <a:spcAft>
+                <a:spcPts val="600"/>
+              </a:spcAft>
+            </a:pPr>
+            <a:r>
+              <a:rPr sz="1500">
+                <a:solidFill>
+                  <a:srgbClr val="22282E"/>
+                </a:solidFill>
+              </a:rPr>
+              <a:t>•  Colocar un honeypot al azar produce una herramienta más que mantener. Primero se modela por dónde pasaría un adversario: shares de administración, repositorios de configuración, segmentos con…</a:t>
+            </a:r>
+          </a:p>
+          <a:p>
+            <a:pPr>
+              <a:spcAft>
+                <a:spcPts val="600"/>
+              </a:spcAft>
+            </a:pPr>
+            <a:r>
+              <a:rPr sz="1500">
+                <a:solidFill>
+                  <a:srgbClr val="22282E"/>
+                </a:solidFill>
+              </a:rPr>
+              <a:t>•  Un honeytoken puede ser una credencial sintética, URL única o registro de base de datos. La señal necesita atribución: cada ubicación usa un token diferente para saber qué fue accedido. La credencial…</a:t>
+            </a:r>
+          </a:p>
+          <a:p>
+            <a:pPr>
+              <a:spcAft>
+                <a:spcPts val="600"/>
+              </a:spcAft>
+            </a:pPr>
+            <a:r>
+              <a:rPr sz="1500">
+                <a:solidFill>
+                  <a:srgbClr val="22282E"/>
+                </a:solidFill>
+              </a:rPr>
+              <a:t>•  Interacción alta permite observar más conducta, pero el atacante ejecuta código dentro del entorno señuelo. Se segmenta salida, limita recursos, captura telemetría y define restauración. También se…</a:t>
+            </a:r>
+          </a:p>
+          <a:p>
+            <a:pPr>
+              <a:spcAft>
+                <a:spcPts val="600"/>
+              </a:spcAft>
+            </a:pPr>
+            <a:r>
+              <a:rPr sz="1500">
+                <a:solidFill>
+                  <a:srgbClr val="22282E"/>
+                </a:solidFill>
+              </a:rPr>
+              <a:t>•  Los accesos legítimos se prueban: scanner, backup, indexador y equipo de infraestructura. Una alerta benigna no invalida deception; indica que la colocación o exclusión necesita ajuste. Rotación y…</a:t>
+            </a:r>
+          </a:p>
+          <a:p>
+            <a:pPr>
+              <a:spcAft>
+                <a:spcPts val="600"/>
+              </a:spcAft>
+            </a:pPr>
+            <a:r>
+              <a:rPr sz="1500">
+                <a:solidFill>
+                  <a:srgbClr val="22282E"/>
+                </a:solidFill>
+              </a:rPr>
+              <a:t>•  Una cuenta señuelo se crea para no iniciar sesiones legítimas y se monitorea en autenticación. Debe carecer de privilegios útiles, tener controles que impidan uso real y distinguir intentos de…</a:t>
             </a:r>
           </a:p>
         </p:txBody>
@@ -4271,7 +4962,7 @@
                   <a:srgbClr val="0B3D2E"/>
                 </a:solidFill>
               </a:rPr>
-              <a:t>🧰 Herramientas y preparación</a:t>
+              <a:t>📔 Glosario</a:t>
             </a:r>
           </a:p>
         </p:txBody>
@@ -4309,82 +5000,97 @@
                   <a:srgbClr val="22282E"/>
                 </a:solidFill>
               </a:rPr>
-              <a:t>•  En laboratorio aislado y segmentado:</a:t>
-            </a:r>
-          </a:p>
-          <a:p>
-            <a:pPr>
-              <a:spcAft>
-                <a:spcPts val="600"/>
-              </a:spcAft>
-            </a:pPr>
-            <a:r>
-              <a:rPr sz="1500">
-                <a:solidFill>
-                  <a:srgbClr val="22282E"/>
-                </a:solidFill>
-              </a:rPr>
-              <a:t>•  T-Pot o honeypots individuales (Cowrie para SSH/Telnet, Dionaea para malware).</a:t>
-            </a:r>
-          </a:p>
-          <a:p>
-            <a:pPr>
-              <a:spcAft>
-                <a:spcPts val="600"/>
-              </a:spcAft>
-            </a:pPr>
-            <a:r>
-              <a:rPr sz="1500">
-                <a:solidFill>
-                  <a:srgbClr val="22282E"/>
-                </a:solidFill>
-              </a:rPr>
-              <a:t>•  Canarytokens (proyecto open source de Thinkst) para tokens de documento, DNS y AWS.</a:t>
-            </a:r>
-          </a:p>
-          <a:p>
-            <a:pPr>
-              <a:spcAft>
-                <a:spcPts val="600"/>
-              </a:spcAft>
-            </a:pPr>
-            <a:r>
-              <a:rPr sz="1500">
-                <a:solidFill>
-                  <a:srgbClr val="22282E"/>
-                </a:solidFill>
-              </a:rPr>
-              <a:t>•  Cuentas trampa en tu AD de laboratorio con auditoría de logon.</a:t>
-            </a:r>
-          </a:p>
-          <a:p>
-            <a:pPr>
-              <a:spcAft>
-                <a:spcPts val="600"/>
-              </a:spcAft>
-            </a:pPr>
-            <a:r>
-              <a:rPr sz="1500">
-                <a:solidFill>
-                  <a:srgbClr val="22282E"/>
-                </a:solidFill>
-              </a:rPr>
-              <a:t>•  Tu SIEM para centralizar las alertas de los señuelos.</a:t>
-            </a:r>
-          </a:p>
-          <a:p>
-            <a:pPr>
-              <a:spcAft>
-                <a:spcPts val="600"/>
-              </a:spcAft>
-            </a:pPr>
-            <a:r>
-              <a:rPr sz="1500">
-                <a:solidFill>
-                  <a:srgbClr val="22282E"/>
-                </a:solidFill>
-              </a:rPr>
-              <a:t>•  Aísla los honeypots del resto de la red para que, si son comprometidos, no sirvan de trampolín.</a:t>
+              <a:t>•  Deception: diseño deliberado de señuelos observables.</a:t>
+            </a:r>
+          </a:p>
+          <a:p>
+            <a:pPr>
+              <a:spcAft>
+                <a:spcPts val="600"/>
+              </a:spcAft>
+            </a:pPr>
+            <a:r>
+              <a:rPr sz="1500">
+                <a:solidFill>
+                  <a:srgbClr val="22282E"/>
+                </a:solidFill>
+              </a:rPr>
+              <a:t>•  Honeypot: sistema instrumentado como objetivo.</a:t>
+            </a:r>
+          </a:p>
+          <a:p>
+            <a:pPr>
+              <a:spcAft>
+                <a:spcPts val="600"/>
+              </a:spcAft>
+            </a:pPr>
+            <a:r>
+              <a:rPr sz="1500">
+                <a:solidFill>
+                  <a:srgbClr val="22282E"/>
+                </a:solidFill>
+              </a:rPr>
+              <a:t>•  Honeytoken: dato sintético cuyo uso alerta.</a:t>
+            </a:r>
+          </a:p>
+          <a:p>
+            <a:pPr>
+              <a:spcAft>
+                <a:spcPts val="600"/>
+              </a:spcAft>
+            </a:pPr>
+            <a:r>
+              <a:rPr sz="1500">
+                <a:solidFill>
+                  <a:srgbClr val="22282E"/>
+                </a:solidFill>
+              </a:rPr>
+              <a:t>•  Interacción baja/alta: funcionalidad ofrecida al visitante.</a:t>
+            </a:r>
+          </a:p>
+          <a:p>
+            <a:pPr>
+              <a:spcAft>
+                <a:spcPts val="600"/>
+              </a:spcAft>
+            </a:pPr>
+            <a:r>
+              <a:rPr sz="1500">
+                <a:solidFill>
+                  <a:srgbClr val="22282E"/>
+                </a:solidFill>
+              </a:rPr>
+              <a:t>•  Canary: recurso que alerta ante acceso inesperado.</a:t>
+            </a:r>
+          </a:p>
+          <a:p>
+            <a:pPr>
+              <a:spcAft>
+                <a:spcPts val="600"/>
+              </a:spcAft>
+            </a:pPr>
+            <a:r>
+              <a:rPr sz="1500">
+                <a:solidFill>
+                  <a:srgbClr val="22282E"/>
+                </a:solidFill>
+              </a:rPr>
+              <a:t>•  Contención: límites que impiden usar el señuelo como pivote.</a:t>
+            </a:r>
+          </a:p>
+          <a:p>
+            <a:pPr>
+              <a:spcAft>
+                <a:spcPts val="600"/>
+              </a:spcAft>
+            </a:pPr>
+            <a:r>
+              <a:rPr sz="1500">
+                <a:solidFill>
+                  <a:srgbClr val="22282E"/>
+                </a:solidFill>
+              </a:rPr>
+              <a:t>•  Rotación: reemplazo controlado de señuelos.</a:t>
             </a:r>
           </a:p>
         </p:txBody>
@@ -4435,7 +5141,7 @@
                   <a:srgbClr val="0B3D2E"/>
                 </a:solidFill>
               </a:rPr>
-              <a:t>🧪 Laboratorio guiado — Siembra señuelos y escucha</a:t>
+              <a:t>📖 Definiciones y características</a:t>
             </a:r>
           </a:p>
         </p:txBody>
@@ -4473,97 +5179,97 @@
                   <a:srgbClr val="22282E"/>
                 </a:solidFill>
               </a:rPr>
-              <a:t>•  Despliega un honeypot SSH. Levanta Cowrie en una VM aislada; confirma que registra intentos de login y comandos.</a:t>
-            </a:r>
-          </a:p>
-          <a:p>
-            <a:pPr>
-              <a:spcAft>
-                <a:spcPts val="600"/>
-              </a:spcAft>
-            </a:pPr>
-            <a:r>
-              <a:rPr sz="1500">
-                <a:solidFill>
-                  <a:srgbClr val="22282E"/>
-                </a:solidFill>
-              </a:rPr>
-              <a:t>•  Segmenta. Coloca el honeypot en una VLAN aislada con salida controlada para que no pueda pivotar.</a:t>
-            </a:r>
-          </a:p>
-          <a:p>
-            <a:pPr>
-              <a:spcAft>
-                <a:spcPts val="600"/>
-              </a:spcAft>
-            </a:pPr>
-            <a:r>
-              <a:rPr sz="1500">
-                <a:solidFill>
-                  <a:srgbClr val="22282E"/>
-                </a:solidFill>
-              </a:rPr>
-              <a:t>•  Genera un canary token. Crea un documento Word/Excel con Canarytokens y colócalo con un nombre atractivo ("nóminas2026.xlsx").</a:t>
-            </a:r>
-          </a:p>
-          <a:p>
-            <a:pPr>
-              <a:spcAft>
-                <a:spcPts val="600"/>
-              </a:spcAft>
-            </a:pPr>
-            <a:r>
-              <a:rPr sz="1500">
-                <a:solidFill>
-                  <a:srgbClr val="22282E"/>
-                </a:solidFill>
-              </a:rPr>
-              <a:t>•  Crea una cuenta trampa. En el AD de laboratorio, añade "svcbackupadmin" con auditoría de logon y sin uso legítimo.</a:t>
-            </a:r>
-          </a:p>
-          <a:p>
-            <a:pPr>
-              <a:spcAft>
-                <a:spcPts val="600"/>
-              </a:spcAft>
-            </a:pPr>
-            <a:r>
-              <a:rPr sz="1500">
-                <a:solidFill>
-                  <a:srgbClr val="22282E"/>
-                </a:solidFill>
-              </a:rPr>
-              <a:t>•  Simula el intruso. Desde otra VM, sondea el honeypot, abre el documento cebo y usa la cuenta trampa.</a:t>
-            </a:r>
-          </a:p>
-          <a:p>
-            <a:pPr>
-              <a:spcAft>
-                <a:spcPts val="600"/>
-              </a:spcAft>
-            </a:pPr>
-            <a:r>
-              <a:rPr sz="1500">
-                <a:solidFill>
-                  <a:srgbClr val="22282E"/>
-                </a:solidFill>
-              </a:rPr>
-              <a:t>•  Verifica las alertas. Confirma que cada interacción genera una señal: eventos de Cowrie, aviso del canary token, 4624/4625 de la cuenta trampa.</a:t>
-            </a:r>
-          </a:p>
-          <a:p>
-            <a:pPr>
-              <a:spcAft>
-                <a:spcPts val="600"/>
-              </a:spcAft>
-            </a:pPr>
-            <a:r>
-              <a:rPr sz="1500">
-                <a:solidFill>
-                  <a:srgbClr val="22282E"/>
-                </a:solidFill>
-              </a:rPr>
-              <a:t>•  Integra en el SIEM. Enruta todas estas señales a una regla de máxima prioridad ("cualquier toque = incidente").</a:t>
+              <a:t>•  Honeypot: sistema señuelo sin propósito productivo, diseñado para ser sondeado. Característica: toda interacción es sospechosa por definición.</a:t>
+            </a:r>
+          </a:p>
+          <a:p>
+            <a:pPr>
+              <a:spcAft>
+                <a:spcPts val="600"/>
+              </a:spcAft>
+            </a:pPr>
+            <a:r>
+              <a:rPr sz="1500">
+                <a:solidFill>
+                  <a:srgbClr val="22282E"/>
+                </a:solidFill>
+              </a:rPr>
+              <a:t>•  Baja interacción: emula servicios (banners, puertos) sin un SO real. Característica: seguro y fácil, datos limitados.</a:t>
+            </a:r>
+          </a:p>
+          <a:p>
+            <a:pPr>
+              <a:spcAft>
+                <a:spcPts val="600"/>
+              </a:spcAft>
+            </a:pPr>
+            <a:r>
+              <a:rPr sz="1500">
+                <a:solidFill>
+                  <a:srgbClr val="22282E"/>
+                </a:solidFill>
+              </a:rPr>
+              <a:t>•  Alta interacción: SO/servicios reales controlados. Característica: datos ricos, mayor riesgo de ser abusado.</a:t>
+            </a:r>
+          </a:p>
+          <a:p>
+            <a:pPr>
+              <a:spcAft>
+                <a:spcPts val="600"/>
+              </a:spcAft>
+            </a:pPr>
+            <a:r>
+              <a:rPr sz="1500">
+                <a:solidFill>
+                  <a:srgbClr val="22282E"/>
+                </a:solidFill>
+              </a:rPr>
+              <a:t>•  Honeytoken: dato-cebo (credencial, archivo, URL, registro) cuya sola invocación dispara alerta. Característica: no requiere un host dedicado.</a:t>
+            </a:r>
+          </a:p>
+          <a:p>
+            <a:pPr>
+              <a:spcAft>
+                <a:spcPts val="600"/>
+              </a:spcAft>
+            </a:pPr>
+            <a:r>
+              <a:rPr sz="1500">
+                <a:solidFill>
+                  <a:srgbClr val="22282E"/>
+                </a:solidFill>
+              </a:rPr>
+              <a:t>•  Canary token: honeytoken que "avisa" al abrirse (documento, DNS, AWS key). Característica: telemetría de alta fidelidad y despliegue trivial.</a:t>
+            </a:r>
+          </a:p>
+          <a:p>
+            <a:pPr>
+              <a:spcAft>
+                <a:spcPts val="600"/>
+              </a:spcAft>
+            </a:pPr>
+            <a:r>
+              <a:rPr sz="1500">
+                <a:solidFill>
+                  <a:srgbClr val="22282E"/>
+                </a:solidFill>
+              </a:rPr>
+              <a:t>•  Cuenta trampa: identidad sintética sin uso productivo, documentada y monitoreada. Característica: un inicio de sesión es una señal de alta prioridad que debe investigarse con procedencia y contexto…</a:t>
+            </a:r>
+          </a:p>
+          <a:p>
+            <a:pPr>
+              <a:spcAft>
+                <a:spcPts val="600"/>
+              </a:spcAft>
+            </a:pPr>
+            <a:r>
+              <a:rPr sz="1500">
+                <a:solidFill>
+                  <a:srgbClr val="22282E"/>
+                </a:solidFill>
+              </a:rPr>
+              <a:t>•  Honeynet: red de honeypots interconectados. Característica: observa movimiento lateral del atacante.</a:t>
             </a:r>
           </a:p>
         </p:txBody>
@@ -4614,7 +5320,7 @@
                   <a:srgbClr val="0B3D2E"/>
                 </a:solidFill>
               </a:rPr>
-              <a:t>✍️ Ejercicios</a:t>
+              <a:t>🔍 Diseño resuelto — token en una ruta de administración</a:t>
             </a:r>
           </a:p>
         </p:txBody>
@@ -4652,82 +5358,37 @@
                   <a:srgbClr val="22282E"/>
                 </a:solidFill>
               </a:rPr>
-              <a:t>•  Compara honeypot de baja y alta interacción con pros/contras.</a:t>
-            </a:r>
-          </a:p>
-          <a:p>
-            <a:pPr>
-              <a:spcAft>
-                <a:spcPts val="600"/>
-              </a:spcAft>
-            </a:pPr>
-            <a:r>
-              <a:rPr sz="1500">
-                <a:solidFill>
-                  <a:srgbClr val="22282E"/>
-                </a:solidFill>
-              </a:rPr>
-              <a:t>•  Diseña la colocación de 3 honeytokens en una red corporativa típica.</a:t>
-            </a:r>
-          </a:p>
-          <a:p>
-            <a:pPr>
-              <a:spcAft>
-                <a:spcPts val="600"/>
-              </a:spcAft>
-            </a:pPr>
-            <a:r>
-              <a:rPr sz="1500">
-                <a:solidFill>
-                  <a:srgbClr val="22282E"/>
-                </a:solidFill>
-              </a:rPr>
-              <a:t>•  Crea una cuenta trampa y su regla de alerta de máxima prioridad.</a:t>
-            </a:r>
-          </a:p>
-          <a:p>
-            <a:pPr>
-              <a:spcAft>
-                <a:spcPts val="600"/>
-              </a:spcAft>
-            </a:pPr>
-            <a:r>
-              <a:rPr sz="1500">
-                <a:solidFill>
-                  <a:srgbClr val="22282E"/>
-                </a:solidFill>
-              </a:rPr>
-              <a:t>•  Explica por qué las señales de deception tienen tan pocos falsos positivos.</a:t>
-            </a:r>
-          </a:p>
-          <a:p>
-            <a:pPr>
-              <a:spcAft>
-                <a:spcPts val="600"/>
-              </a:spcAft>
-            </a:pPr>
-            <a:r>
-              <a:rPr sz="1500">
-                <a:solidFill>
-                  <a:srgbClr val="22282E"/>
-                </a:solidFill>
-              </a:rPr>
-              <a:t>•  Enumera 3 riesgos de un honeypot mal segmentado y su mitigación.</a:t>
-            </a:r>
-          </a:p>
-          <a:p>
-            <a:pPr>
-              <a:spcAft>
-                <a:spcPts val="600"/>
-              </a:spcAft>
-            </a:pPr>
-            <a:r>
-              <a:rPr sz="1500">
-                <a:solidFill>
-                  <a:srgbClr val="22282E"/>
-                </a:solidFill>
-              </a:rPr>
-              <a:t>•  Diseña un canary token para detectar acceso no autorizado a un repositorio.</a:t>
+              <a:t>•  El modelo de ataque muestra que un adversario con acceso a un share de documentación buscaría credenciales de automatización. Se coloca un archivo sintético con una URL única que no otorga acceso.…</a:t>
+            </a:r>
+          </a:p>
+          <a:p>
+            <a:pPr>
+              <a:spcAft>
+                <a:spcPts val="600"/>
+              </a:spcAft>
+            </a:pPr>
+            <a:r>
+              <a:rPr sz="1500">
+                <a:solidFill>
+                  <a:srgbClr val="22282E"/>
+                </a:solidFill>
+              </a:rPr>
+              <a:t>•  Antes de activar se prueban backup, indexador, antivirus y administradores. El backup toca el archivo y genera una alerta benigna; se ajusta la colocación o se añade contexto estrecho, no se ignoran…</a:t>
+            </a:r>
+          </a:p>
+          <a:p>
+            <a:pPr>
+              <a:spcAft>
+                <a:spcPts val="600"/>
+              </a:spcAft>
+            </a:pPr>
+            <a:r>
+              <a:rPr sz="1500">
+                <a:solidFill>
+                  <a:srgbClr val="22282E"/>
+                </a:solidFill>
+              </a:rPr>
+              <a:t>•  El token tiene dueño, expiración y rotación. El receptor se monitorea y no expone sistemas reales. Si se usa un honeypot de alta interacción, se aplican segmentación, control de salida, captura y…</a:t>
             </a:r>
           </a:p>
         </p:txBody>
@@ -4778,7 +5439,7 @@
                   <a:srgbClr val="0B3D2E"/>
                 </a:solidFill>
               </a:rPr>
-              <a:t>📝 Reto verificable</a:t>
+              <a:t>✅ Criterio de dominio</a:t>
             </a:r>
           </a:p>
         </p:txBody>
@@ -4816,7 +5477,7 @@
                   <a:srgbClr val="22282E"/>
                 </a:solidFill>
               </a:rPr>
-              <a:t>•  Despliega al menos dos mecanismos de deception (p. ej. un honeypot y un honeytoken/cuenta trampa) e intégralos al SIEM con alertas de alta prioridad. Criterio de aceptación: cada interacción simulada dispara una alerta de máxima prioridad en el SIEM identificando origen y señuelo tocado, y el honeypot está segmentado de forma que no pueda usarse como pivote hacia el resto de la red.</a:t>
+              <a:t>•  El alumno justifica ubicación por ruta de ataque, demuestra que el señuelo no concede privilegio, prueba alertado y falsos positivos legítimos, y documenta contención y ciclo de vida.</a:t>
             </a:r>
           </a:p>
         </p:txBody>
